--- a/clase_08_optimizacion_agentes/slides/slides_clase08_avanzado_enriquecido.pptx
+++ b/clase_08_optimizacion_agentes/slides/slides_clase08_avanzado_enriquecido.pptx
@@ -3258,7 +3258,7 @@
                 </a:solidFill>
                 <a:latin typeface="Segoe UI"/>
               </a:rPr>
-              <a:t>Docentes: Ariel Giamportone, Soraya Corvalán</a:t>
+              <a:t>Docentes: Damian Giacone, Ariel Giamportone</a:t>
             </a:r>
           </a:p>
         </p:txBody>

--- a/clase_08_optimizacion_agentes/slides/slides_clase08_avanzado_enriquecido.pptx
+++ b/clase_08_optimizacion_agentes/slides/slides_clase08_avanzado_enriquecido.pptx
@@ -3101,14 +3101,14 @@
       <p:grpSpPr/>
       <p:pic>
         <p:nvPicPr>
-          <p:cNvPr id="2" name="Picture 1" descr="cover_bg.png"/>
+          <p:cNvPr id="8" name="Picture 7" descr="cover_bg.png"/>
           <p:cNvPicPr>
             <a:picLocks noChangeAspect="1"/>
           </p:cNvPicPr>
           <p:nvPr/>
         </p:nvPicPr>
         <p:blipFill>
-          <a:blip r:embed="rId2"/>
+          <a:blip r:embed="rId3"/>
           <a:stretch>
             <a:fillRect/>
           </a:stretch>

--- a/clase_08_optimizacion_agentes/slides/slides_clase08_avanzado_enriquecido.pptx
+++ b/clase_08_optimizacion_agentes/slides/slides_clase08_avanzado_enriquecido.pptx
@@ -11,14 +11,11 @@
     <p:sldId id="259" r:id="rId10"/>
     <p:sldId id="260" r:id="rId11"/>
     <p:sldId id="261" r:id="rId12"/>
+    <p:sldId id="262" r:id="rId13"/>
     <p:sldId id="263" r:id="rId14"/>
     <p:sldId id="264" r:id="rId15"/>
-    <p:sldId id="265" r:id="rId16"/>
-    <p:sldId id="266" r:id="rId17"/>
-    <p:sldId id="267" r:id="rId18"/>
-    <p:sldId id="262" r:id="rId13"/>
   </p:sldIdLst>
-  <p:sldSz cx="12191695" cy="6858000" type="screen4x3"/>
+  <p:sldSz cx="12192000" cy="6858000" type="screen4x3"/>
   <p:notesSz cx="6858000" cy="9144000"/>
   <p:defaultTextStyle>
     <a:defPPr>
@@ -3101,224 +3098,7 @@
       <p:grpSpPr/>
       <p:pic>
         <p:nvPicPr>
-          <p:cNvPr id="8" name="Picture 7" descr="cover_bg.png"/>
-          <p:cNvPicPr>
-            <a:picLocks noChangeAspect="1"/>
-          </p:cNvPicPr>
-          <p:nvPr/>
-        </p:nvPicPr>
-        <p:blipFill>
-          <a:blip r:embed="rId3"/>
-          <a:stretch>
-            <a:fillRect/>
-          </a:stretch>
-        </p:blipFill>
-        <p:spPr>
-          <a:xfrm>
-            <a:off x="0" y="0"/>
-            <a:ext cx="12191695" cy="6858000"/>
-          </a:xfrm>
-          <a:prstGeom prst="rect">
-            <a:avLst/>
-          </a:prstGeom>
-        </p:spPr>
-      </p:pic>
-      <p:sp>
-        <p:nvSpPr>
-          <p:cNvPr id="3" name="TextBox 2"/>
-          <p:cNvSpPr txBox="1"/>
-          <p:nvPr/>
-        </p:nvSpPr>
-        <p:spPr>
-          <a:xfrm>
-            <a:off x="566928" y="4041648"/>
-            <a:ext cx="8229600" cy="411480"/>
-          </a:xfrm>
-          <a:prstGeom prst="rect">
-            <a:avLst/>
-          </a:prstGeom>
-          <a:noFill/>
-        </p:spPr>
-        <p:txBody>
-          <a:bodyPr wrap="square" anchor="t">
-            <a:spAutoFit/>
-          </a:bodyPr>
-          <a:lstStyle/>
-          <a:p>
-            <a:pPr algn="l"/>
-            <a:r>
-              <a:rPr sz="1500" b="1">
-                <a:solidFill>
-                  <a:srgbClr val="E7C14B"/>
-                </a:solidFill>
-                <a:latin typeface="Segoe UI"/>
-              </a:rPr>
-              <a:t>CLASE 8</a:t>
-            </a:r>
-          </a:p>
-        </p:txBody>
-      </p:sp>
-      <p:sp>
-        <p:nvSpPr>
-          <p:cNvPr id="4" name="TextBox 3"/>
-          <p:cNvSpPr txBox="1"/>
-          <p:nvPr/>
-        </p:nvSpPr>
-        <p:spPr>
-          <a:xfrm>
-            <a:off x="548640" y="4389120"/>
-            <a:ext cx="9692640" cy="1371600"/>
-          </a:xfrm>
-          <a:prstGeom prst="rect">
-            <a:avLst/>
-          </a:prstGeom>
-          <a:noFill/>
-        </p:spPr>
-        <p:txBody>
-          <a:bodyPr wrap="square" anchor="t">
-            <a:spAutoFit/>
-          </a:bodyPr>
-          <a:lstStyle/>
-          <a:p>
-            <a:pPr algn="l"/>
-            <a:r>
-              <a:rPr sz="3200" b="1">
-                <a:solidFill>
-                  <a:srgbClr val="FFFFFF"/>
-                </a:solidFill>
-                <a:latin typeface="Segoe UI"/>
-              </a:rPr>
-              <a:t>Optimización de Operaciones y Agentes de IA</a:t>
-            </a:r>
-          </a:p>
-        </p:txBody>
-      </p:sp>
-      <p:sp>
-        <p:nvSpPr>
-          <p:cNvPr id="5" name="TextBox 4"/>
-          <p:cNvSpPr txBox="1"/>
-          <p:nvPr/>
-        </p:nvSpPr>
-        <p:spPr>
-          <a:xfrm>
-            <a:off x="566928" y="5623560"/>
-            <a:ext cx="9692640" cy="457200"/>
-          </a:xfrm>
-          <a:prstGeom prst="rect">
-            <a:avLst/>
-          </a:prstGeom>
-          <a:noFill/>
-        </p:spPr>
-        <p:txBody>
-          <a:bodyPr wrap="square" anchor="t">
-            <a:spAutoFit/>
-          </a:bodyPr>
-          <a:lstStyle/>
-          <a:p>
-            <a:pPr algn="l"/>
-            <a:r>
-              <a:rPr sz="1550" b="0">
-                <a:solidFill>
-                  <a:srgbClr val="DDE9F0"/>
-                </a:solidFill>
-                <a:latin typeface="Segoe UI"/>
-              </a:rPr>
-              <a:t>Clase 8 · Nivel AVANZADO — Agentes autónomos para la flota</a:t>
-            </a:r>
-          </a:p>
-        </p:txBody>
-      </p:sp>
-      <p:sp>
-        <p:nvSpPr>
-          <p:cNvPr id="6" name="TextBox 5"/>
-          <p:cNvSpPr txBox="1"/>
-          <p:nvPr/>
-        </p:nvSpPr>
-        <p:spPr>
-          <a:xfrm>
-            <a:off x="566928" y="6108192"/>
-            <a:ext cx="9692640" cy="365760"/>
-          </a:xfrm>
-          <a:prstGeom prst="rect">
-            <a:avLst/>
-          </a:prstGeom>
-          <a:noFill/>
-        </p:spPr>
-        <p:txBody>
-          <a:bodyPr wrap="square" anchor="t">
-            <a:spAutoFit/>
-          </a:bodyPr>
-          <a:lstStyle/>
-          <a:p>
-            <a:pPr algn="l"/>
-            <a:r>
-              <a:rPr sz="1350" b="1">
-                <a:solidFill>
-                  <a:srgbClr val="FFFFFF"/>
-                </a:solidFill>
-                <a:latin typeface="Segoe UI"/>
-              </a:rPr>
-              <a:t>Docentes: Damian Giacone, Ariel Giamportone</a:t>
-            </a:r>
-          </a:p>
-        </p:txBody>
-      </p:sp>
-      <p:sp>
-        <p:nvSpPr>
-          <p:cNvPr id="7" name="TextBox 6"/>
-          <p:cNvSpPr txBox="1"/>
-          <p:nvPr/>
-        </p:nvSpPr>
-        <p:spPr>
-          <a:xfrm>
-            <a:off x="566928" y="6455664"/>
-            <a:ext cx="10789920" cy="320040"/>
-          </a:xfrm>
-          <a:prstGeom prst="rect">
-            <a:avLst/>
-          </a:prstGeom>
-          <a:noFill/>
-        </p:spPr>
-        <p:txBody>
-          <a:bodyPr wrap="square" anchor="t">
-            <a:spAutoFit/>
-          </a:bodyPr>
-          <a:lstStyle/>
-          <a:p>
-            <a:pPr algn="l"/>
-            <a:r>
-              <a:rPr sz="1000" b="0">
-                <a:solidFill>
-                  <a:srgbClr val="DDE9F0"/>
-                </a:solidFill>
-                <a:latin typeface="Segoe UI"/>
-              </a:rPr>
-              <a:t>Inteligencia Artificial Aplicada a la Producción Pesquera  |  UTN FRCh  |  2026</a:t>
-            </a:r>
-          </a:p>
-        </p:txBody>
-      </p:sp>
-    </p:spTree>
-  </p:cSld>
-  <p:clrMapOvr>
-    <a:masterClrMapping/>
-  </p:clrMapOvr>
-</p:sld>
-</file>
-
-<file path=ppt/slides/slide10.xml><?xml version="1.0" encoding="utf-8"?>
-<p:sld xmlns:a="http://schemas.openxmlformats.org/drawingml/2006/main" xmlns:p="http://schemas.openxmlformats.org/presentationml/2006/main" xmlns:r="http://schemas.openxmlformats.org/officeDocument/2006/relationships">
-  <p:cSld>
-    <p:spTree>
-      <p:nvGrpSpPr>
-        <p:cNvPr id="1" name=""/>
-        <p:cNvGrpSpPr/>
-        <p:nvPr/>
-      </p:nvGrpSpPr>
-      <p:grpSpPr/>
-      <p:pic>
-        <p:nvPicPr>
-          <p:cNvPr id="2" name="Picture 1" descr="c8_3.png"/>
+          <p:cNvPr id="2" name="Picture 1" descr="title_bg.png"/>
           <p:cNvPicPr>
             <a:picLocks noChangeAspect="1"/>
           </p:cNvPicPr>
@@ -3333,97 +3113,183 @@
         <p:spPr>
           <a:xfrm>
             <a:off x="0" y="0"/>
-            <a:ext cx="12191695" cy="6858000"/>
+            <a:ext cx="12192000" cy="6858000"/>
           </a:xfrm>
           <a:prstGeom prst="rect">
             <a:avLst/>
           </a:prstGeom>
         </p:spPr>
       </p:pic>
-    </p:spTree>
-  </p:cSld>
-  <p:clrMapOvr>
-    <a:masterClrMapping/>
-  </p:clrMapOvr>
-</p:sld>
-</file>
-
-<file path=ppt/slides/slide11.xml><?xml version="1.0" encoding="utf-8"?>
-<p:sld xmlns:a="http://schemas.openxmlformats.org/drawingml/2006/main" xmlns:p="http://schemas.openxmlformats.org/presentationml/2006/main" xmlns:r="http://schemas.openxmlformats.org/officeDocument/2006/relationships">
-  <p:cSld>
-    <p:spTree>
-      <p:nvGrpSpPr>
-        <p:cNvPr id="1" name=""/>
-        <p:cNvGrpSpPr/>
-        <p:nvPr/>
-      </p:nvGrpSpPr>
-      <p:grpSpPr/>
-      <p:pic>
-        <p:nvPicPr>
-          <p:cNvPr id="2" name="Picture 1" descr="c8_d1.png"/>
-          <p:cNvPicPr>
-            <a:picLocks noChangeAspect="1"/>
-          </p:cNvPicPr>
+      <p:sp>
+        <p:nvSpPr>
+          <p:cNvPr id="3" name="TextBox 2"/>
+          <p:cNvSpPr txBox="1"/>
           <p:nvPr/>
-        </p:nvPicPr>
-        <p:blipFill>
-          <a:blip r:embed="rId2"/>
-          <a:stretch>
-            <a:fillRect/>
-          </a:stretch>
-        </p:blipFill>
+        </p:nvSpPr>
         <p:spPr>
           <a:xfrm>
-            <a:off x="0" y="0"/>
-            <a:ext cx="12191695" cy="6858000"/>
+            <a:off x="566928" y="2880360"/>
+            <a:ext cx="5486400" cy="457200"/>
           </a:xfrm>
           <a:prstGeom prst="rect">
             <a:avLst/>
           </a:prstGeom>
+          <a:noFill/>
         </p:spPr>
-      </p:pic>
-    </p:spTree>
-  </p:cSld>
-  <p:clrMapOvr>
-    <a:masterClrMapping/>
-  </p:clrMapOvr>
-</p:sld>
-</file>
-
-<file path=ppt/slides/slide12.xml><?xml version="1.0" encoding="utf-8"?>
-<p:sld xmlns:a="http://schemas.openxmlformats.org/drawingml/2006/main" xmlns:p="http://schemas.openxmlformats.org/presentationml/2006/main" xmlns:r="http://schemas.openxmlformats.org/officeDocument/2006/relationships">
-  <p:cSld>
-    <p:spTree>
-      <p:nvGrpSpPr>
-        <p:cNvPr id="1" name=""/>
-        <p:cNvGrpSpPr/>
-        <p:nvPr/>
-      </p:nvGrpSpPr>
-      <p:grpSpPr/>
-      <p:pic>
-        <p:nvPicPr>
-          <p:cNvPr id="2" name="Picture 1" descr="c8_d2.png"/>
-          <p:cNvPicPr>
-            <a:picLocks noChangeAspect="1"/>
-          </p:cNvPicPr>
+        <p:txBody>
+          <a:bodyPr wrap="square">
+            <a:spAutoFit/>
+          </a:bodyPr>
+          <a:lstStyle/>
+          <a:p>
+            <a:r>
+              <a:rPr sz="2200" b="1">
+                <a:solidFill>
+                  <a:srgbClr val="F2B133"/>
+                </a:solidFill>
+                <a:latin typeface="Segoe UI"/>
+              </a:rPr>
+              <a:t>CLASE 8</a:t>
+            </a:r>
+          </a:p>
+        </p:txBody>
+      </p:sp>
+      <p:sp>
+        <p:nvSpPr>
+          <p:cNvPr id="4" name="TextBox 3"/>
+          <p:cNvSpPr txBox="1"/>
           <p:nvPr/>
-        </p:nvPicPr>
-        <p:blipFill>
-          <a:blip r:embed="rId2"/>
-          <a:stretch>
-            <a:fillRect/>
-          </a:stretch>
-        </p:blipFill>
+        </p:nvSpPr>
         <p:spPr>
           <a:xfrm>
-            <a:off x="0" y="0"/>
-            <a:ext cx="12191695" cy="6858000"/>
+            <a:off x="548640" y="3200400"/>
+            <a:ext cx="10058400" cy="1005840"/>
           </a:xfrm>
           <a:prstGeom prst="rect">
             <a:avLst/>
           </a:prstGeom>
+          <a:noFill/>
         </p:spPr>
-      </p:pic>
+        <p:txBody>
+          <a:bodyPr wrap="square">
+            <a:spAutoFit/>
+          </a:bodyPr>
+          <a:lstStyle/>
+          <a:p>
+            <a:r>
+              <a:rPr sz="4000" b="1">
+                <a:solidFill>
+                  <a:srgbClr val="FFFFFF"/>
+                </a:solidFill>
+                <a:latin typeface="Segoe UI"/>
+              </a:rPr>
+              <a:t>Optimización de Operaciones y Agentes de IA</a:t>
+            </a:r>
+          </a:p>
+        </p:txBody>
+      </p:sp>
+      <p:sp>
+        <p:nvSpPr>
+          <p:cNvPr id="5" name="TextBox 4"/>
+          <p:cNvSpPr txBox="1"/>
+          <p:nvPr/>
+        </p:nvSpPr>
+        <p:spPr>
+          <a:xfrm>
+            <a:off x="566928" y="4315968"/>
+            <a:ext cx="10058400" cy="457200"/>
+          </a:xfrm>
+          <a:prstGeom prst="rect">
+            <a:avLst/>
+          </a:prstGeom>
+          <a:noFill/>
+        </p:spPr>
+        <p:txBody>
+          <a:bodyPr wrap="square">
+            <a:spAutoFit/>
+          </a:bodyPr>
+          <a:lstStyle/>
+          <a:p>
+            <a:r>
+              <a:rPr sz="1800" b="0">
+                <a:solidFill>
+                  <a:srgbClr val="CFE6F2"/>
+                </a:solidFill>
+                <a:latin typeface="Segoe UI"/>
+              </a:rPr>
+              <a:t>Clase 8 · Nivel AVANZADO — Agentes autónomos para la flota</a:t>
+            </a:r>
+          </a:p>
+        </p:txBody>
+      </p:sp>
+      <p:sp>
+        <p:nvSpPr>
+          <p:cNvPr id="6" name="TextBox 5"/>
+          <p:cNvSpPr txBox="1"/>
+          <p:nvPr/>
+        </p:nvSpPr>
+        <p:spPr>
+          <a:xfrm>
+            <a:off x="566928" y="4864608"/>
+            <a:ext cx="10058400" cy="365760"/>
+          </a:xfrm>
+          <a:prstGeom prst="rect">
+            <a:avLst/>
+          </a:prstGeom>
+          <a:noFill/>
+        </p:spPr>
+        <p:txBody>
+          <a:bodyPr wrap="square">
+            <a:spAutoFit/>
+          </a:bodyPr>
+          <a:lstStyle/>
+          <a:p>
+            <a:r>
+              <a:rPr sz="1400" b="1">
+                <a:solidFill>
+                  <a:srgbClr val="FFFFFF"/>
+                </a:solidFill>
+                <a:latin typeface="Segoe UI"/>
+              </a:rPr>
+              <a:t>Docentes: Damián Giacone · Ariel Giamportone</a:t>
+            </a:r>
+          </a:p>
+        </p:txBody>
+      </p:sp>
+      <p:sp>
+        <p:nvSpPr>
+          <p:cNvPr id="7" name="TextBox 6"/>
+          <p:cNvSpPr txBox="1"/>
+          <p:nvPr/>
+        </p:nvSpPr>
+        <p:spPr>
+          <a:xfrm>
+            <a:off x="566928" y="5193792"/>
+            <a:ext cx="10058400" cy="365760"/>
+          </a:xfrm>
+          <a:prstGeom prst="rect">
+            <a:avLst/>
+          </a:prstGeom>
+          <a:noFill/>
+        </p:spPr>
+        <p:txBody>
+          <a:bodyPr wrap="square">
+            <a:spAutoFit/>
+          </a:bodyPr>
+          <a:lstStyle/>
+          <a:p>
+            <a:r>
+              <a:rPr sz="1150" b="0">
+                <a:solidFill>
+                  <a:srgbClr val="AFCEDE"/>
+                </a:solidFill>
+                <a:latin typeface="Segoe UI"/>
+              </a:rPr>
+              <a:t>Inteligencia Artificial Aplicada a la Producción Pesquera  |  UTN FRCh  |  PesquerosEnIA  |  2026</a:t>
+            </a:r>
+          </a:p>
+        </p:txBody>
+      </p:sp>
     </p:spTree>
   </p:cSld>
   <p:clrMapOvr>
@@ -3442,377 +3308,9 @@
         <p:nvPr/>
       </p:nvGrpSpPr>
       <p:grpSpPr/>
-      <p:sp>
-        <p:nvSpPr>
-          <p:cNvPr id="2" name="Rectangle 1"/>
-          <p:cNvSpPr/>
-          <p:nvPr/>
-        </p:nvSpPr>
-        <p:spPr>
-          <a:xfrm>
-            <a:off x="0" y="0"/>
-            <a:ext cx="12191695" cy="6858000"/>
-          </a:xfrm>
-          <a:prstGeom prst="rect">
-            <a:avLst/>
-          </a:prstGeom>
-          <a:solidFill>
-            <a:srgbClr val="F5F7FA"/>
-          </a:solidFill>
-          <a:ln>
-            <a:noFill/>
-          </a:ln>
-          <a:effectLst/>
-        </p:spPr>
-        <p:style>
-          <a:lnRef idx="1">
-            <a:schemeClr val="accent1"/>
-          </a:lnRef>
-          <a:fillRef idx="3">
-            <a:schemeClr val="accent1"/>
-          </a:fillRef>
-          <a:effectRef idx="2">
-            <a:schemeClr val="accent1"/>
-          </a:effectRef>
-          <a:fontRef idx="minor">
-            <a:schemeClr val="lt1"/>
-          </a:fontRef>
-        </p:style>
-        <p:txBody>
-          <a:bodyPr rtlCol="0" anchor="ctr"/>
-          <a:lstStyle/>
-          <a:p>
-            <a:pPr algn="ctr"/>
-          </a:p>
-        </p:txBody>
-      </p:sp>
-      <p:sp>
-        <p:nvSpPr>
-          <p:cNvPr id="3" name="Rectangle 2"/>
-          <p:cNvSpPr/>
-          <p:nvPr/>
-        </p:nvSpPr>
-        <p:spPr>
-          <a:xfrm>
-            <a:off x="0" y="0"/>
-            <a:ext cx="201168" cy="6858000"/>
-          </a:xfrm>
-          <a:prstGeom prst="rect">
-            <a:avLst/>
-          </a:prstGeom>
-          <a:solidFill>
-            <a:srgbClr val="962D37"/>
-          </a:solidFill>
-          <a:ln>
-            <a:noFill/>
-          </a:ln>
-          <a:effectLst/>
-        </p:spPr>
-        <p:style>
-          <a:lnRef idx="1">
-            <a:schemeClr val="accent1"/>
-          </a:lnRef>
-          <a:fillRef idx="3">
-            <a:schemeClr val="accent1"/>
-          </a:fillRef>
-          <a:effectRef idx="2">
-            <a:schemeClr val="accent1"/>
-          </a:effectRef>
-          <a:fontRef idx="minor">
-            <a:schemeClr val="lt1"/>
-          </a:fontRef>
-        </p:style>
-        <p:txBody>
-          <a:bodyPr rtlCol="0" anchor="ctr"/>
-          <a:lstStyle/>
-          <a:p>
-            <a:pPr algn="ctr"/>
-          </a:p>
-        </p:txBody>
-      </p:sp>
-      <p:sp>
-        <p:nvSpPr>
-          <p:cNvPr id="4" name="Rectangle 3"/>
-          <p:cNvSpPr/>
-          <p:nvPr/>
-        </p:nvSpPr>
-        <p:spPr>
-          <a:xfrm>
-            <a:off x="0" y="0"/>
-            <a:ext cx="12191695" cy="1371600"/>
-          </a:xfrm>
-          <a:prstGeom prst="rect">
-            <a:avLst/>
-          </a:prstGeom>
-          <a:solidFill>
-            <a:srgbClr val="962D37"/>
-          </a:solidFill>
-          <a:ln>
-            <a:noFill/>
-          </a:ln>
-          <a:effectLst/>
-        </p:spPr>
-        <p:style>
-          <a:lnRef idx="1">
-            <a:schemeClr val="accent1"/>
-          </a:lnRef>
-          <a:fillRef idx="3">
-            <a:schemeClr val="accent1"/>
-          </a:fillRef>
-          <a:effectRef idx="2">
-            <a:schemeClr val="accent1"/>
-          </a:effectRef>
-          <a:fontRef idx="minor">
-            <a:schemeClr val="lt1"/>
-          </a:fontRef>
-        </p:style>
-        <p:txBody>
-          <a:bodyPr rtlCol="0" anchor="ctr"/>
-          <a:lstStyle/>
-          <a:p>
-            <a:pPr algn="ctr"/>
-          </a:p>
-        </p:txBody>
-      </p:sp>
-      <p:sp>
-        <p:nvSpPr>
-          <p:cNvPr id="5" name="TextBox 4"/>
-          <p:cNvSpPr txBox="1"/>
-          <p:nvPr/>
-        </p:nvSpPr>
-        <p:spPr>
-          <a:xfrm>
-            <a:off x="365760" y="73152"/>
-            <a:ext cx="11247120" cy="411480"/>
-          </a:xfrm>
-          <a:prstGeom prst="rect">
-            <a:avLst/>
-          </a:prstGeom>
-          <a:noFill/>
-        </p:spPr>
-        <p:txBody>
-          <a:bodyPr wrap="square" anchor="t">
-            <a:spAutoFit/>
-          </a:bodyPr>
-          <a:lstStyle/>
-          <a:p>
-            <a:pPr algn="l"/>
-            <a:r>
-              <a:rPr sz="1300" b="1">
-                <a:solidFill>
-                  <a:srgbClr val="E7C14B"/>
-                </a:solidFill>
-                <a:latin typeface="Segoe UI"/>
-              </a:rPr>
-              <a:t>AGENDA DE LA CLASE</a:t>
-            </a:r>
-          </a:p>
-        </p:txBody>
-      </p:sp>
-      <p:sp>
-        <p:nvSpPr>
-          <p:cNvPr id="6" name="TextBox 5"/>
-          <p:cNvSpPr txBox="1"/>
-          <p:nvPr/>
-        </p:nvSpPr>
-        <p:spPr>
-          <a:xfrm>
-            <a:off x="365760" y="384048"/>
-            <a:ext cx="11064240" cy="914400"/>
-          </a:xfrm>
-          <a:prstGeom prst="rect">
-            <a:avLst/>
-          </a:prstGeom>
-          <a:noFill/>
-        </p:spPr>
-        <p:txBody>
-          <a:bodyPr wrap="square" anchor="t">
-            <a:spAutoFit/>
-          </a:bodyPr>
-          <a:lstStyle/>
-          <a:p>
-            <a:pPr algn="l"/>
-            <a:r>
-              <a:rPr sz="2600" b="1">
-                <a:solidFill>
-                  <a:srgbClr val="FFFFFF"/>
-                </a:solidFill>
-                <a:latin typeface="Segoe UI"/>
-              </a:rPr>
-              <a:t>Lo que vamos a ver hoy</a:t>
-            </a:r>
-          </a:p>
-        </p:txBody>
-      </p:sp>
-      <p:sp>
-        <p:nvSpPr>
-          <p:cNvPr id="7" name="TextBox 6"/>
-          <p:cNvSpPr txBox="1"/>
-          <p:nvPr/>
-        </p:nvSpPr>
-        <p:spPr>
-          <a:xfrm>
-            <a:off x="502920" y="1691640"/>
-            <a:ext cx="11155680" cy="4572000"/>
-          </a:xfrm>
-          <a:prstGeom prst="rect">
-            <a:avLst/>
-          </a:prstGeom>
-          <a:noFill/>
-        </p:spPr>
-        <p:txBody>
-          <a:bodyPr wrap="square">
-            <a:spAutoFit/>
-          </a:bodyPr>
-          <a:lstStyle/>
-          <a:p>
-            <a:pPr>
-              <a:spcAft>
-                <a:spcPts val="1400"/>
-              </a:spcAft>
-            </a:pPr>
-            <a:r>
-              <a:rPr sz="1900">
-                <a:solidFill>
-                  <a:srgbClr val="1E1E32"/>
-                </a:solidFill>
-                <a:latin typeface="Segoe UI"/>
-              </a:rPr>
-              <a:t>•  El combustible: la mayor palanca de ahorro</a:t>
-            </a:r>
-          </a:p>
-          <a:p>
-            <a:pPr>
-              <a:spcAft>
-                <a:spcPts val="1400"/>
-              </a:spcAft>
-            </a:pPr>
-            <a:r>
-              <a:rPr sz="1900">
-                <a:solidFill>
-                  <a:srgbClr val="1E1E32"/>
-                </a:solidFill>
-                <a:latin typeface="Segoe UI"/>
-              </a:rPr>
-              <a:t>•  La velocidad óptima (ley cúbica)</a:t>
-            </a:r>
-          </a:p>
-          <a:p>
-            <a:pPr>
-              <a:spcAft>
-                <a:spcPts val="1400"/>
-              </a:spcAft>
-            </a:pPr>
-            <a:r>
-              <a:rPr sz="1900">
-                <a:solidFill>
-                  <a:srgbClr val="1E1E32"/>
-                </a:solidFill>
-                <a:latin typeface="Segoe UI"/>
-              </a:rPr>
-              <a:t>•  Clustering y mantenimiento predictivo</a:t>
-            </a:r>
-          </a:p>
-          <a:p>
-            <a:pPr>
-              <a:spcAft>
-                <a:spcPts val="1400"/>
-              </a:spcAft>
-            </a:pPr>
-            <a:r>
-              <a:rPr sz="1900">
-                <a:solidFill>
-                  <a:srgbClr val="1E1E32"/>
-                </a:solidFill>
-                <a:latin typeface="Segoe UI"/>
-              </a:rPr>
-              <a:t>•  Un agente de IA que vigila la flota</a:t>
-            </a:r>
-          </a:p>
-        </p:txBody>
-      </p:sp>
-      <p:sp>
-        <p:nvSpPr>
-          <p:cNvPr id="8" name="Rectangle 7"/>
-          <p:cNvSpPr/>
-          <p:nvPr/>
-        </p:nvSpPr>
-        <p:spPr>
-          <a:xfrm>
-            <a:off x="0" y="6419088"/>
-            <a:ext cx="12191695" cy="438912"/>
-          </a:xfrm>
-          <a:prstGeom prst="rect">
-            <a:avLst/>
-          </a:prstGeom>
-          <a:solidFill>
-            <a:srgbClr val="962D37"/>
-          </a:solidFill>
-          <a:ln>
-            <a:noFill/>
-          </a:ln>
-          <a:effectLst/>
-        </p:spPr>
-        <p:style>
-          <a:lnRef idx="1">
-            <a:schemeClr val="accent1"/>
-          </a:lnRef>
-          <a:fillRef idx="3">
-            <a:schemeClr val="accent1"/>
-          </a:fillRef>
-          <a:effectRef idx="2">
-            <a:schemeClr val="accent1"/>
-          </a:effectRef>
-          <a:fontRef idx="minor">
-            <a:schemeClr val="lt1"/>
-          </a:fontRef>
-        </p:style>
-        <p:txBody>
-          <a:bodyPr rtlCol="0" anchor="ctr"/>
-          <a:lstStyle/>
-          <a:p>
-            <a:pPr algn="ctr"/>
-          </a:p>
-        </p:txBody>
-      </p:sp>
-      <p:sp>
-        <p:nvSpPr>
-          <p:cNvPr id="9" name="TextBox 8"/>
-          <p:cNvSpPr txBox="1"/>
-          <p:nvPr/>
-        </p:nvSpPr>
-        <p:spPr>
-          <a:xfrm>
-            <a:off x="566928" y="6473952"/>
-            <a:ext cx="11430000" cy="329184"/>
-          </a:xfrm>
-          <a:prstGeom prst="rect">
-            <a:avLst/>
-          </a:prstGeom>
-          <a:noFill/>
-        </p:spPr>
-        <p:txBody>
-          <a:bodyPr wrap="square" anchor="t">
-            <a:spAutoFit/>
-          </a:bodyPr>
-          <a:lstStyle/>
-          <a:p>
-            <a:pPr algn="l"/>
-            <a:r>
-              <a:rPr sz="1000" b="0">
-                <a:solidFill>
-                  <a:srgbClr val="FFFFFF"/>
-                </a:solidFill>
-                <a:latin typeface="Segoe UI"/>
-              </a:rPr>
-              <a:t>IA Aplicada a la Producción Pesquera   |   UTN FRCh   |   PesquerosEnIA   |   2026</a:t>
-            </a:r>
-          </a:p>
-        </p:txBody>
-      </p:sp>
       <p:pic>
         <p:nvPicPr>
-          <p:cNvPr id="10" name="Picture 9" descr="fishlogo.png"/>
+          <p:cNvPr id="2" name="Picture 1" descr="img_agenda.png"/>
           <p:cNvPicPr>
             <a:picLocks noChangeAspect="1"/>
           </p:cNvPicPr>
@@ -3826,8 +3324,8 @@
         </p:blipFill>
         <p:spPr>
           <a:xfrm>
-            <a:off x="137160" y="6455664"/>
-            <a:ext cx="347472" cy="347472"/>
+            <a:off x="0" y="0"/>
+            <a:ext cx="12192000" cy="6858000"/>
           </a:xfrm>
           <a:prstGeom prst="rect">
             <a:avLst/>
@@ -3852,361 +3350,9 @@
         <p:nvPr/>
       </p:nvGrpSpPr>
       <p:grpSpPr/>
-      <p:sp>
-        <p:nvSpPr>
-          <p:cNvPr id="2" name="Rectangle 1"/>
-          <p:cNvSpPr/>
-          <p:nvPr/>
-        </p:nvSpPr>
-        <p:spPr>
-          <a:xfrm>
-            <a:off x="0" y="0"/>
-            <a:ext cx="12191695" cy="6858000"/>
-          </a:xfrm>
-          <a:prstGeom prst="rect">
-            <a:avLst/>
-          </a:prstGeom>
-          <a:solidFill>
-            <a:srgbClr val="F5F7FA"/>
-          </a:solidFill>
-          <a:ln>
-            <a:noFill/>
-          </a:ln>
-          <a:effectLst/>
-        </p:spPr>
-        <p:style>
-          <a:lnRef idx="1">
-            <a:schemeClr val="accent1"/>
-          </a:lnRef>
-          <a:fillRef idx="3">
-            <a:schemeClr val="accent1"/>
-          </a:fillRef>
-          <a:effectRef idx="2">
-            <a:schemeClr val="accent1"/>
-          </a:effectRef>
-          <a:fontRef idx="minor">
-            <a:schemeClr val="lt1"/>
-          </a:fontRef>
-        </p:style>
-        <p:txBody>
-          <a:bodyPr rtlCol="0" anchor="ctr"/>
-          <a:lstStyle/>
-          <a:p>
-            <a:pPr algn="ctr"/>
-          </a:p>
-        </p:txBody>
-      </p:sp>
-      <p:sp>
-        <p:nvSpPr>
-          <p:cNvPr id="3" name="Rectangle 2"/>
-          <p:cNvSpPr/>
-          <p:nvPr/>
-        </p:nvSpPr>
-        <p:spPr>
-          <a:xfrm>
-            <a:off x="0" y="0"/>
-            <a:ext cx="201168" cy="6858000"/>
-          </a:xfrm>
-          <a:prstGeom prst="rect">
-            <a:avLst/>
-          </a:prstGeom>
-          <a:solidFill>
-            <a:srgbClr val="962D37"/>
-          </a:solidFill>
-          <a:ln>
-            <a:noFill/>
-          </a:ln>
-          <a:effectLst/>
-        </p:spPr>
-        <p:style>
-          <a:lnRef idx="1">
-            <a:schemeClr val="accent1"/>
-          </a:lnRef>
-          <a:fillRef idx="3">
-            <a:schemeClr val="accent1"/>
-          </a:fillRef>
-          <a:effectRef idx="2">
-            <a:schemeClr val="accent1"/>
-          </a:effectRef>
-          <a:fontRef idx="minor">
-            <a:schemeClr val="lt1"/>
-          </a:fontRef>
-        </p:style>
-        <p:txBody>
-          <a:bodyPr rtlCol="0" anchor="ctr"/>
-          <a:lstStyle/>
-          <a:p>
-            <a:pPr algn="ctr"/>
-          </a:p>
-        </p:txBody>
-      </p:sp>
-      <p:sp>
-        <p:nvSpPr>
-          <p:cNvPr id="4" name="Rectangle 3"/>
-          <p:cNvSpPr/>
-          <p:nvPr/>
-        </p:nvSpPr>
-        <p:spPr>
-          <a:xfrm>
-            <a:off x="0" y="0"/>
-            <a:ext cx="12191695" cy="1371600"/>
-          </a:xfrm>
-          <a:prstGeom prst="rect">
-            <a:avLst/>
-          </a:prstGeom>
-          <a:solidFill>
-            <a:srgbClr val="962D37"/>
-          </a:solidFill>
-          <a:ln>
-            <a:noFill/>
-          </a:ln>
-          <a:effectLst/>
-        </p:spPr>
-        <p:style>
-          <a:lnRef idx="1">
-            <a:schemeClr val="accent1"/>
-          </a:lnRef>
-          <a:fillRef idx="3">
-            <a:schemeClr val="accent1"/>
-          </a:fillRef>
-          <a:effectRef idx="2">
-            <a:schemeClr val="accent1"/>
-          </a:effectRef>
-          <a:fontRef idx="minor">
-            <a:schemeClr val="lt1"/>
-          </a:fontRef>
-        </p:style>
-        <p:txBody>
-          <a:bodyPr rtlCol="0" anchor="ctr"/>
-          <a:lstStyle/>
-          <a:p>
-            <a:pPr algn="ctr"/>
-          </a:p>
-        </p:txBody>
-      </p:sp>
-      <p:sp>
-        <p:nvSpPr>
-          <p:cNvPr id="5" name="TextBox 4"/>
-          <p:cNvSpPr txBox="1"/>
-          <p:nvPr/>
-        </p:nvSpPr>
-        <p:spPr>
-          <a:xfrm>
-            <a:off x="365760" y="73152"/>
-            <a:ext cx="11247120" cy="411480"/>
-          </a:xfrm>
-          <a:prstGeom prst="rect">
-            <a:avLst/>
-          </a:prstGeom>
-          <a:noFill/>
-        </p:spPr>
-        <p:txBody>
-          <a:bodyPr wrap="square" anchor="t">
-            <a:spAutoFit/>
-          </a:bodyPr>
-          <a:lstStyle/>
-          <a:p>
-            <a:pPr algn="l"/>
-            <a:r>
-              <a:rPr sz="1300" b="1">
-                <a:solidFill>
-                  <a:srgbClr val="E7C14B"/>
-                </a:solidFill>
-                <a:latin typeface="Segoe UI"/>
-              </a:rPr>
-              <a:t>EL GRAN COSTO</a:t>
-            </a:r>
-          </a:p>
-        </p:txBody>
-      </p:sp>
-      <p:sp>
-        <p:nvSpPr>
-          <p:cNvPr id="6" name="TextBox 5"/>
-          <p:cNvSpPr txBox="1"/>
-          <p:nvPr/>
-        </p:nvSpPr>
-        <p:spPr>
-          <a:xfrm>
-            <a:off x="365760" y="384048"/>
-            <a:ext cx="11064240" cy="914400"/>
-          </a:xfrm>
-          <a:prstGeom prst="rect">
-            <a:avLst/>
-          </a:prstGeom>
-          <a:noFill/>
-        </p:spPr>
-        <p:txBody>
-          <a:bodyPr wrap="square" anchor="t">
-            <a:spAutoFit/>
-          </a:bodyPr>
-          <a:lstStyle/>
-          <a:p>
-            <a:pPr algn="l"/>
-            <a:r>
-              <a:rPr sz="2600" b="1">
-                <a:solidFill>
-                  <a:srgbClr val="FFFFFF"/>
-                </a:solidFill>
-                <a:latin typeface="Segoe UI"/>
-              </a:rPr>
-              <a:t>El combustible: la mayor palanca</a:t>
-            </a:r>
-          </a:p>
-        </p:txBody>
-      </p:sp>
-      <p:sp>
-        <p:nvSpPr>
-          <p:cNvPr id="7" name="TextBox 6"/>
-          <p:cNvSpPr txBox="1"/>
-          <p:nvPr/>
-        </p:nvSpPr>
-        <p:spPr>
-          <a:xfrm>
-            <a:off x="502920" y="1691640"/>
-            <a:ext cx="11155680" cy="4572000"/>
-          </a:xfrm>
-          <a:prstGeom prst="rect">
-            <a:avLst/>
-          </a:prstGeom>
-          <a:noFill/>
-        </p:spPr>
-        <p:txBody>
-          <a:bodyPr wrap="square">
-            <a:spAutoFit/>
-          </a:bodyPr>
-          <a:lstStyle/>
-          <a:p>
-            <a:pPr>
-              <a:spcAft>
-                <a:spcPts val="1400"/>
-              </a:spcAft>
-            </a:pPr>
-            <a:r>
-              <a:rPr sz="1900">
-                <a:solidFill>
-                  <a:srgbClr val="1E1E32"/>
-                </a:solidFill>
-                <a:latin typeface="Segoe UI"/>
-              </a:rPr>
-              <a:t>•  El gasoil es el 25–40 % del costo de una marea</a:t>
-            </a:r>
-          </a:p>
-          <a:p>
-            <a:pPr>
-              <a:spcAft>
-                <a:spcPts val="1400"/>
-              </a:spcAft>
-            </a:pPr>
-            <a:r>
-              <a:rPr sz="1900">
-                <a:solidFill>
-                  <a:srgbClr val="1E1E32"/>
-                </a:solidFill>
-                <a:latin typeface="Segoe UI"/>
-              </a:rPr>
-              <a:t>•  Un modelo predice el consumo: ruta, velocidad, clima y estado del barco</a:t>
-            </a:r>
-          </a:p>
-          <a:p>
-            <a:pPr>
-              <a:spcAft>
-                <a:spcPts val="1400"/>
-              </a:spcAft>
-            </a:pPr>
-            <a:r>
-              <a:rPr sz="1900">
-                <a:solidFill>
-                  <a:srgbClr val="1E1E32"/>
-                </a:solidFill>
-                <a:latin typeface="Segoe UI"/>
-              </a:rPr>
-              <a:t>•  Permite presupuestar y comparar barcos de la flota</a:t>
-            </a:r>
-          </a:p>
-        </p:txBody>
-      </p:sp>
-      <p:sp>
-        <p:nvSpPr>
-          <p:cNvPr id="8" name="Rectangle 7"/>
-          <p:cNvSpPr/>
-          <p:nvPr/>
-        </p:nvSpPr>
-        <p:spPr>
-          <a:xfrm>
-            <a:off x="0" y="6419088"/>
-            <a:ext cx="12191695" cy="438912"/>
-          </a:xfrm>
-          <a:prstGeom prst="rect">
-            <a:avLst/>
-          </a:prstGeom>
-          <a:solidFill>
-            <a:srgbClr val="962D37"/>
-          </a:solidFill>
-          <a:ln>
-            <a:noFill/>
-          </a:ln>
-          <a:effectLst/>
-        </p:spPr>
-        <p:style>
-          <a:lnRef idx="1">
-            <a:schemeClr val="accent1"/>
-          </a:lnRef>
-          <a:fillRef idx="3">
-            <a:schemeClr val="accent1"/>
-          </a:fillRef>
-          <a:effectRef idx="2">
-            <a:schemeClr val="accent1"/>
-          </a:effectRef>
-          <a:fontRef idx="minor">
-            <a:schemeClr val="lt1"/>
-          </a:fontRef>
-        </p:style>
-        <p:txBody>
-          <a:bodyPr rtlCol="0" anchor="ctr"/>
-          <a:lstStyle/>
-          <a:p>
-            <a:pPr algn="ctr"/>
-          </a:p>
-        </p:txBody>
-      </p:sp>
-      <p:sp>
-        <p:nvSpPr>
-          <p:cNvPr id="9" name="TextBox 8"/>
-          <p:cNvSpPr txBox="1"/>
-          <p:nvPr/>
-        </p:nvSpPr>
-        <p:spPr>
-          <a:xfrm>
-            <a:off x="566928" y="6473952"/>
-            <a:ext cx="11430000" cy="329184"/>
-          </a:xfrm>
-          <a:prstGeom prst="rect">
-            <a:avLst/>
-          </a:prstGeom>
-          <a:noFill/>
-        </p:spPr>
-        <p:txBody>
-          <a:bodyPr wrap="square" anchor="t">
-            <a:spAutoFit/>
-          </a:bodyPr>
-          <a:lstStyle/>
-          <a:p>
-            <a:pPr algn="l"/>
-            <a:r>
-              <a:rPr sz="1000" b="0">
-                <a:solidFill>
-                  <a:srgbClr val="FFFFFF"/>
-                </a:solidFill>
-                <a:latin typeface="Segoe UI"/>
-              </a:rPr>
-              <a:t>IA Aplicada a la Producción Pesquera   |   UTN FRCh   |   PesquerosEnIA   |   2026</a:t>
-            </a:r>
-          </a:p>
-        </p:txBody>
-      </p:sp>
       <p:pic>
         <p:nvPicPr>
-          <p:cNvPr id="10" name="Picture 9" descr="fishlogo.png"/>
+          <p:cNvPr id="2" name="Picture 1" descr="reuse_combustible.png"/>
           <p:cNvPicPr>
             <a:picLocks noChangeAspect="1"/>
           </p:cNvPicPr>
@@ -4220,8 +3366,8 @@
         </p:blipFill>
         <p:spPr>
           <a:xfrm>
-            <a:off x="137160" y="6455664"/>
-            <a:ext cx="347472" cy="347472"/>
+            <a:off x="0" y="0"/>
+            <a:ext cx="12192000" cy="6858000"/>
           </a:xfrm>
           <a:prstGeom prst="rect">
             <a:avLst/>
@@ -4246,361 +3392,9 @@
         <p:nvPr/>
       </p:nvGrpSpPr>
       <p:grpSpPr/>
-      <p:sp>
-        <p:nvSpPr>
-          <p:cNvPr id="2" name="Rectangle 1"/>
-          <p:cNvSpPr/>
-          <p:nvPr/>
-        </p:nvSpPr>
-        <p:spPr>
-          <a:xfrm>
-            <a:off x="0" y="0"/>
-            <a:ext cx="12191695" cy="6858000"/>
-          </a:xfrm>
-          <a:prstGeom prst="rect">
-            <a:avLst/>
-          </a:prstGeom>
-          <a:solidFill>
-            <a:srgbClr val="F5F7FA"/>
-          </a:solidFill>
-          <a:ln>
-            <a:noFill/>
-          </a:ln>
-          <a:effectLst/>
-        </p:spPr>
-        <p:style>
-          <a:lnRef idx="1">
-            <a:schemeClr val="accent1"/>
-          </a:lnRef>
-          <a:fillRef idx="3">
-            <a:schemeClr val="accent1"/>
-          </a:fillRef>
-          <a:effectRef idx="2">
-            <a:schemeClr val="accent1"/>
-          </a:effectRef>
-          <a:fontRef idx="minor">
-            <a:schemeClr val="lt1"/>
-          </a:fontRef>
-        </p:style>
-        <p:txBody>
-          <a:bodyPr rtlCol="0" anchor="ctr"/>
-          <a:lstStyle/>
-          <a:p>
-            <a:pPr algn="ctr"/>
-          </a:p>
-        </p:txBody>
-      </p:sp>
-      <p:sp>
-        <p:nvSpPr>
-          <p:cNvPr id="3" name="Rectangle 2"/>
-          <p:cNvSpPr/>
-          <p:nvPr/>
-        </p:nvSpPr>
-        <p:spPr>
-          <a:xfrm>
-            <a:off x="0" y="0"/>
-            <a:ext cx="201168" cy="6858000"/>
-          </a:xfrm>
-          <a:prstGeom prst="rect">
-            <a:avLst/>
-          </a:prstGeom>
-          <a:solidFill>
-            <a:srgbClr val="962D37"/>
-          </a:solidFill>
-          <a:ln>
-            <a:noFill/>
-          </a:ln>
-          <a:effectLst/>
-        </p:spPr>
-        <p:style>
-          <a:lnRef idx="1">
-            <a:schemeClr val="accent1"/>
-          </a:lnRef>
-          <a:fillRef idx="3">
-            <a:schemeClr val="accent1"/>
-          </a:fillRef>
-          <a:effectRef idx="2">
-            <a:schemeClr val="accent1"/>
-          </a:effectRef>
-          <a:fontRef idx="minor">
-            <a:schemeClr val="lt1"/>
-          </a:fontRef>
-        </p:style>
-        <p:txBody>
-          <a:bodyPr rtlCol="0" anchor="ctr"/>
-          <a:lstStyle/>
-          <a:p>
-            <a:pPr algn="ctr"/>
-          </a:p>
-        </p:txBody>
-      </p:sp>
-      <p:sp>
-        <p:nvSpPr>
-          <p:cNvPr id="4" name="Rectangle 3"/>
-          <p:cNvSpPr/>
-          <p:nvPr/>
-        </p:nvSpPr>
-        <p:spPr>
-          <a:xfrm>
-            <a:off x="0" y="0"/>
-            <a:ext cx="12191695" cy="1371600"/>
-          </a:xfrm>
-          <a:prstGeom prst="rect">
-            <a:avLst/>
-          </a:prstGeom>
-          <a:solidFill>
-            <a:srgbClr val="962D37"/>
-          </a:solidFill>
-          <a:ln>
-            <a:noFill/>
-          </a:ln>
-          <a:effectLst/>
-        </p:spPr>
-        <p:style>
-          <a:lnRef idx="1">
-            <a:schemeClr val="accent1"/>
-          </a:lnRef>
-          <a:fillRef idx="3">
-            <a:schemeClr val="accent1"/>
-          </a:fillRef>
-          <a:effectRef idx="2">
-            <a:schemeClr val="accent1"/>
-          </a:effectRef>
-          <a:fontRef idx="minor">
-            <a:schemeClr val="lt1"/>
-          </a:fontRef>
-        </p:style>
-        <p:txBody>
-          <a:bodyPr rtlCol="0" anchor="ctr"/>
-          <a:lstStyle/>
-          <a:p>
-            <a:pPr algn="ctr"/>
-          </a:p>
-        </p:txBody>
-      </p:sp>
-      <p:sp>
-        <p:nvSpPr>
-          <p:cNvPr id="5" name="TextBox 4"/>
-          <p:cNvSpPr txBox="1"/>
-          <p:nvPr/>
-        </p:nvSpPr>
-        <p:spPr>
-          <a:xfrm>
-            <a:off x="365760" y="73152"/>
-            <a:ext cx="11247120" cy="411480"/>
-          </a:xfrm>
-          <a:prstGeom prst="rect">
-            <a:avLst/>
-          </a:prstGeom>
-          <a:noFill/>
-        </p:spPr>
-        <p:txBody>
-          <a:bodyPr wrap="square" anchor="t">
-            <a:spAutoFit/>
-          </a:bodyPr>
-          <a:lstStyle/>
-          <a:p>
-            <a:pPr algn="l"/>
-            <a:r>
-              <a:rPr sz="1300" b="1">
-                <a:solidFill>
-                  <a:srgbClr val="E7C14B"/>
-                </a:solidFill>
-                <a:latin typeface="Segoe UI"/>
-              </a:rPr>
-              <a:t>LA LEY CÚBICA</a:t>
-            </a:r>
-          </a:p>
-        </p:txBody>
-      </p:sp>
-      <p:sp>
-        <p:nvSpPr>
-          <p:cNvPr id="6" name="TextBox 5"/>
-          <p:cNvSpPr txBox="1"/>
-          <p:nvPr/>
-        </p:nvSpPr>
-        <p:spPr>
-          <a:xfrm>
-            <a:off x="365760" y="384048"/>
-            <a:ext cx="11064240" cy="914400"/>
-          </a:xfrm>
-          <a:prstGeom prst="rect">
-            <a:avLst/>
-          </a:prstGeom>
-          <a:noFill/>
-        </p:spPr>
-        <p:txBody>
-          <a:bodyPr wrap="square" anchor="t">
-            <a:spAutoFit/>
-          </a:bodyPr>
-          <a:lstStyle/>
-          <a:p>
-            <a:pPr algn="l"/>
-            <a:r>
-              <a:rPr sz="2600" b="1">
-                <a:solidFill>
-                  <a:srgbClr val="FFFFFF"/>
-                </a:solidFill>
-                <a:latin typeface="Segoe UI"/>
-              </a:rPr>
-              <a:t>La velocidad óptima</a:t>
-            </a:r>
-          </a:p>
-        </p:txBody>
-      </p:sp>
-      <p:sp>
-        <p:nvSpPr>
-          <p:cNvPr id="7" name="TextBox 6"/>
-          <p:cNvSpPr txBox="1"/>
-          <p:nvPr/>
-        </p:nvSpPr>
-        <p:spPr>
-          <a:xfrm>
-            <a:off x="502920" y="1691640"/>
-            <a:ext cx="11155680" cy="4572000"/>
-          </a:xfrm>
-          <a:prstGeom prst="rect">
-            <a:avLst/>
-          </a:prstGeom>
-          <a:noFill/>
-        </p:spPr>
-        <p:txBody>
-          <a:bodyPr wrap="square">
-            <a:spAutoFit/>
-          </a:bodyPr>
-          <a:lstStyle/>
-          <a:p>
-            <a:pPr>
-              <a:spcAft>
-                <a:spcPts val="1400"/>
-              </a:spcAft>
-            </a:pPr>
-            <a:r>
-              <a:rPr sz="1900">
-                <a:solidFill>
-                  <a:srgbClr val="1E1E32"/>
-                </a:solidFill>
-                <a:latin typeface="Segoe UI"/>
-              </a:rPr>
-              <a:t>•  El consumo sube con el cubo de la velocidad: el doble de rápido gasta ~8 veces más</a:t>
-            </a:r>
-          </a:p>
-          <a:p>
-            <a:pPr>
-              <a:spcAft>
-                <a:spcPts val="1400"/>
-              </a:spcAft>
-            </a:pPr>
-            <a:r>
-              <a:rPr sz="1900">
-                <a:solidFill>
-                  <a:srgbClr val="1E1E32"/>
-                </a:solidFill>
-                <a:latin typeface="Segoe UI"/>
-              </a:rPr>
-              <a:t>•  Ir muy lento suma días de tripulación</a:t>
-            </a:r>
-          </a:p>
-          <a:p>
-            <a:pPr>
-              <a:spcAft>
-                <a:spcPts val="1400"/>
-              </a:spcAft>
-            </a:pPr>
-            <a:r>
-              <a:rPr sz="1900">
-                <a:solidFill>
-                  <a:srgbClr val="1E1E32"/>
-                </a:solidFill>
-                <a:latin typeface="Segoe UI"/>
-              </a:rPr>
-              <a:t>•  Existe una velocidad de mínimo costo total: ni la máxima ni la mínima</a:t>
-            </a:r>
-          </a:p>
-        </p:txBody>
-      </p:sp>
-      <p:sp>
-        <p:nvSpPr>
-          <p:cNvPr id="8" name="Rectangle 7"/>
-          <p:cNvSpPr/>
-          <p:nvPr/>
-        </p:nvSpPr>
-        <p:spPr>
-          <a:xfrm>
-            <a:off x="0" y="6419088"/>
-            <a:ext cx="12191695" cy="438912"/>
-          </a:xfrm>
-          <a:prstGeom prst="rect">
-            <a:avLst/>
-          </a:prstGeom>
-          <a:solidFill>
-            <a:srgbClr val="962D37"/>
-          </a:solidFill>
-          <a:ln>
-            <a:noFill/>
-          </a:ln>
-          <a:effectLst/>
-        </p:spPr>
-        <p:style>
-          <a:lnRef idx="1">
-            <a:schemeClr val="accent1"/>
-          </a:lnRef>
-          <a:fillRef idx="3">
-            <a:schemeClr val="accent1"/>
-          </a:fillRef>
-          <a:effectRef idx="2">
-            <a:schemeClr val="accent1"/>
-          </a:effectRef>
-          <a:fontRef idx="minor">
-            <a:schemeClr val="lt1"/>
-          </a:fontRef>
-        </p:style>
-        <p:txBody>
-          <a:bodyPr rtlCol="0" anchor="ctr"/>
-          <a:lstStyle/>
-          <a:p>
-            <a:pPr algn="ctr"/>
-          </a:p>
-        </p:txBody>
-      </p:sp>
-      <p:sp>
-        <p:nvSpPr>
-          <p:cNvPr id="9" name="TextBox 8"/>
-          <p:cNvSpPr txBox="1"/>
-          <p:nvPr/>
-        </p:nvSpPr>
-        <p:spPr>
-          <a:xfrm>
-            <a:off x="566928" y="6473952"/>
-            <a:ext cx="11430000" cy="329184"/>
-          </a:xfrm>
-          <a:prstGeom prst="rect">
-            <a:avLst/>
-          </a:prstGeom>
-          <a:noFill/>
-        </p:spPr>
-        <p:txBody>
-          <a:bodyPr wrap="square" anchor="t">
-            <a:spAutoFit/>
-          </a:bodyPr>
-          <a:lstStyle/>
-          <a:p>
-            <a:pPr algn="l"/>
-            <a:r>
-              <a:rPr sz="1000" b="0">
-                <a:solidFill>
-                  <a:srgbClr val="FFFFFF"/>
-                </a:solidFill>
-                <a:latin typeface="Segoe UI"/>
-              </a:rPr>
-              <a:t>IA Aplicada a la Producción Pesquera   |   UTN FRCh   |   PesquerosEnIA   |   2026</a:t>
-            </a:r>
-          </a:p>
-        </p:txBody>
-      </p:sp>
       <p:pic>
         <p:nvPicPr>
-          <p:cNvPr id="10" name="Picture 9" descr="fishlogo.png"/>
+          <p:cNvPr id="2" name="Picture 1" descr="reuse_gasoil.png"/>
           <p:cNvPicPr>
             <a:picLocks noChangeAspect="1"/>
           </p:cNvPicPr>
@@ -4614,8 +3408,8 @@
         </p:blipFill>
         <p:spPr>
           <a:xfrm>
-            <a:off x="137160" y="6455664"/>
-            <a:ext cx="347472" cy="347472"/>
+            <a:off x="0" y="0"/>
+            <a:ext cx="12192000" cy="6858000"/>
           </a:xfrm>
           <a:prstGeom prst="rect">
             <a:avLst/>
@@ -4640,361 +3434,9 @@
         <p:nvPr/>
       </p:nvGrpSpPr>
       <p:grpSpPr/>
-      <p:sp>
-        <p:nvSpPr>
-          <p:cNvPr id="2" name="Rectangle 1"/>
-          <p:cNvSpPr/>
-          <p:nvPr/>
-        </p:nvSpPr>
-        <p:spPr>
-          <a:xfrm>
-            <a:off x="0" y="0"/>
-            <a:ext cx="12191695" cy="6858000"/>
-          </a:xfrm>
-          <a:prstGeom prst="rect">
-            <a:avLst/>
-          </a:prstGeom>
-          <a:solidFill>
-            <a:srgbClr val="F5F7FA"/>
-          </a:solidFill>
-          <a:ln>
-            <a:noFill/>
-          </a:ln>
-          <a:effectLst/>
-        </p:spPr>
-        <p:style>
-          <a:lnRef idx="1">
-            <a:schemeClr val="accent1"/>
-          </a:lnRef>
-          <a:fillRef idx="3">
-            <a:schemeClr val="accent1"/>
-          </a:fillRef>
-          <a:effectRef idx="2">
-            <a:schemeClr val="accent1"/>
-          </a:effectRef>
-          <a:fontRef idx="minor">
-            <a:schemeClr val="lt1"/>
-          </a:fontRef>
-        </p:style>
-        <p:txBody>
-          <a:bodyPr rtlCol="0" anchor="ctr"/>
-          <a:lstStyle/>
-          <a:p>
-            <a:pPr algn="ctr"/>
-          </a:p>
-        </p:txBody>
-      </p:sp>
-      <p:sp>
-        <p:nvSpPr>
-          <p:cNvPr id="3" name="Rectangle 2"/>
-          <p:cNvSpPr/>
-          <p:nvPr/>
-        </p:nvSpPr>
-        <p:spPr>
-          <a:xfrm>
-            <a:off x="0" y="0"/>
-            <a:ext cx="201168" cy="6858000"/>
-          </a:xfrm>
-          <a:prstGeom prst="rect">
-            <a:avLst/>
-          </a:prstGeom>
-          <a:solidFill>
-            <a:srgbClr val="962D37"/>
-          </a:solidFill>
-          <a:ln>
-            <a:noFill/>
-          </a:ln>
-          <a:effectLst/>
-        </p:spPr>
-        <p:style>
-          <a:lnRef idx="1">
-            <a:schemeClr val="accent1"/>
-          </a:lnRef>
-          <a:fillRef idx="3">
-            <a:schemeClr val="accent1"/>
-          </a:fillRef>
-          <a:effectRef idx="2">
-            <a:schemeClr val="accent1"/>
-          </a:effectRef>
-          <a:fontRef idx="minor">
-            <a:schemeClr val="lt1"/>
-          </a:fontRef>
-        </p:style>
-        <p:txBody>
-          <a:bodyPr rtlCol="0" anchor="ctr"/>
-          <a:lstStyle/>
-          <a:p>
-            <a:pPr algn="ctr"/>
-          </a:p>
-        </p:txBody>
-      </p:sp>
-      <p:sp>
-        <p:nvSpPr>
-          <p:cNvPr id="4" name="Rectangle 3"/>
-          <p:cNvSpPr/>
-          <p:nvPr/>
-        </p:nvSpPr>
-        <p:spPr>
-          <a:xfrm>
-            <a:off x="0" y="0"/>
-            <a:ext cx="12191695" cy="1371600"/>
-          </a:xfrm>
-          <a:prstGeom prst="rect">
-            <a:avLst/>
-          </a:prstGeom>
-          <a:solidFill>
-            <a:srgbClr val="962D37"/>
-          </a:solidFill>
-          <a:ln>
-            <a:noFill/>
-          </a:ln>
-          <a:effectLst/>
-        </p:spPr>
-        <p:style>
-          <a:lnRef idx="1">
-            <a:schemeClr val="accent1"/>
-          </a:lnRef>
-          <a:fillRef idx="3">
-            <a:schemeClr val="accent1"/>
-          </a:fillRef>
-          <a:effectRef idx="2">
-            <a:schemeClr val="accent1"/>
-          </a:effectRef>
-          <a:fontRef idx="minor">
-            <a:schemeClr val="lt1"/>
-          </a:fontRef>
-        </p:style>
-        <p:txBody>
-          <a:bodyPr rtlCol="0" anchor="ctr"/>
-          <a:lstStyle/>
-          <a:p>
-            <a:pPr algn="ctr"/>
-          </a:p>
-        </p:txBody>
-      </p:sp>
-      <p:sp>
-        <p:nvSpPr>
-          <p:cNvPr id="5" name="TextBox 4"/>
-          <p:cNvSpPr txBox="1"/>
-          <p:nvPr/>
-        </p:nvSpPr>
-        <p:spPr>
-          <a:xfrm>
-            <a:off x="365760" y="73152"/>
-            <a:ext cx="11247120" cy="411480"/>
-          </a:xfrm>
-          <a:prstGeom prst="rect">
-            <a:avLst/>
-          </a:prstGeom>
-          <a:noFill/>
-        </p:spPr>
-        <p:txBody>
-          <a:bodyPr wrap="square" anchor="t">
-            <a:spAutoFit/>
-          </a:bodyPr>
-          <a:lstStyle/>
-          <a:p>
-            <a:pPr algn="l"/>
-            <a:r>
-              <a:rPr sz="1300" b="1">
-                <a:solidFill>
-                  <a:srgbClr val="E7C14B"/>
-                </a:solidFill>
-                <a:latin typeface="Segoe UI"/>
-              </a:rPr>
-              <a:t>ANTICIPAR</a:t>
-            </a:r>
-          </a:p>
-        </p:txBody>
-      </p:sp>
-      <p:sp>
-        <p:nvSpPr>
-          <p:cNvPr id="6" name="TextBox 5"/>
-          <p:cNvSpPr txBox="1"/>
-          <p:nvPr/>
-        </p:nvSpPr>
-        <p:spPr>
-          <a:xfrm>
-            <a:off x="365760" y="384048"/>
-            <a:ext cx="11064240" cy="914400"/>
-          </a:xfrm>
-          <a:prstGeom prst="rect">
-            <a:avLst/>
-          </a:prstGeom>
-          <a:noFill/>
-        </p:spPr>
-        <p:txBody>
-          <a:bodyPr wrap="square" anchor="t">
-            <a:spAutoFit/>
-          </a:bodyPr>
-          <a:lstStyle/>
-          <a:p>
-            <a:pPr algn="l"/>
-            <a:r>
-              <a:rPr sz="2600" b="1">
-                <a:solidFill>
-                  <a:srgbClr val="FFFFFF"/>
-                </a:solidFill>
-                <a:latin typeface="Segoe UI"/>
-              </a:rPr>
-              <a:t>Clustering y mantenimiento predictivo</a:t>
-            </a:r>
-          </a:p>
-        </p:txBody>
-      </p:sp>
-      <p:sp>
-        <p:nvSpPr>
-          <p:cNvPr id="7" name="TextBox 6"/>
-          <p:cNvSpPr txBox="1"/>
-          <p:nvPr/>
-        </p:nvSpPr>
-        <p:spPr>
-          <a:xfrm>
-            <a:off x="502920" y="1691640"/>
-            <a:ext cx="11155680" cy="4572000"/>
-          </a:xfrm>
-          <a:prstGeom prst="rect">
-            <a:avLst/>
-          </a:prstGeom>
-          <a:noFill/>
-        </p:spPr>
-        <p:txBody>
-          <a:bodyPr wrap="square">
-            <a:spAutoFit/>
-          </a:bodyPr>
-          <a:lstStyle/>
-          <a:p>
-            <a:pPr>
-              <a:spcAft>
-                <a:spcPts val="1400"/>
-              </a:spcAft>
-            </a:pPr>
-            <a:r>
-              <a:rPr sz="1900">
-                <a:solidFill>
-                  <a:srgbClr val="1E1E32"/>
-                </a:solidFill>
-                <a:latin typeface="Segoe UI"/>
-              </a:rPr>
-              <a:t>•  K-Means agrupa zonas por eficiencia para planificar la campaña</a:t>
-            </a:r>
-          </a:p>
-          <a:p>
-            <a:pPr>
-              <a:spcAft>
-                <a:spcPts val="1400"/>
-              </a:spcAft>
-            </a:pPr>
-            <a:r>
-              <a:rPr sz="1900">
-                <a:solidFill>
-                  <a:srgbClr val="1E1E32"/>
-                </a:solidFill>
-                <a:latin typeface="Segoe UI"/>
-              </a:rPr>
-              <a:t>•  La telemetría del motor (temperatura, presión, vibración) anticipa fallas</a:t>
-            </a:r>
-          </a:p>
-          <a:p>
-            <a:pPr>
-              <a:spcAft>
-                <a:spcPts val="1400"/>
-              </a:spcAft>
-            </a:pPr>
-            <a:r>
-              <a:rPr sz="1900">
-                <a:solidFill>
-                  <a:srgbClr val="1E1E32"/>
-                </a:solidFill>
-                <a:latin typeface="Segoe UI"/>
-              </a:rPr>
-              <a:t>•  Se pasa de arreglar cuando se rompe a intervenir antes, en puerto</a:t>
-            </a:r>
-          </a:p>
-        </p:txBody>
-      </p:sp>
-      <p:sp>
-        <p:nvSpPr>
-          <p:cNvPr id="8" name="Rectangle 7"/>
-          <p:cNvSpPr/>
-          <p:nvPr/>
-        </p:nvSpPr>
-        <p:spPr>
-          <a:xfrm>
-            <a:off x="0" y="6419088"/>
-            <a:ext cx="12191695" cy="438912"/>
-          </a:xfrm>
-          <a:prstGeom prst="rect">
-            <a:avLst/>
-          </a:prstGeom>
-          <a:solidFill>
-            <a:srgbClr val="962D37"/>
-          </a:solidFill>
-          <a:ln>
-            <a:noFill/>
-          </a:ln>
-          <a:effectLst/>
-        </p:spPr>
-        <p:style>
-          <a:lnRef idx="1">
-            <a:schemeClr val="accent1"/>
-          </a:lnRef>
-          <a:fillRef idx="3">
-            <a:schemeClr val="accent1"/>
-          </a:fillRef>
-          <a:effectRef idx="2">
-            <a:schemeClr val="accent1"/>
-          </a:effectRef>
-          <a:fontRef idx="minor">
-            <a:schemeClr val="lt1"/>
-          </a:fontRef>
-        </p:style>
-        <p:txBody>
-          <a:bodyPr rtlCol="0" anchor="ctr"/>
-          <a:lstStyle/>
-          <a:p>
-            <a:pPr algn="ctr"/>
-          </a:p>
-        </p:txBody>
-      </p:sp>
-      <p:sp>
-        <p:nvSpPr>
-          <p:cNvPr id="9" name="TextBox 8"/>
-          <p:cNvSpPr txBox="1"/>
-          <p:nvPr/>
-        </p:nvSpPr>
-        <p:spPr>
-          <a:xfrm>
-            <a:off x="566928" y="6473952"/>
-            <a:ext cx="11430000" cy="329184"/>
-          </a:xfrm>
-          <a:prstGeom prst="rect">
-            <a:avLst/>
-          </a:prstGeom>
-          <a:noFill/>
-        </p:spPr>
-        <p:txBody>
-          <a:bodyPr wrap="square" anchor="t">
-            <a:spAutoFit/>
-          </a:bodyPr>
-          <a:lstStyle/>
-          <a:p>
-            <a:pPr algn="l"/>
-            <a:r>
-              <a:rPr sz="1000" b="0">
-                <a:solidFill>
-                  <a:srgbClr val="FFFFFF"/>
-                </a:solidFill>
-                <a:latin typeface="Segoe UI"/>
-              </a:rPr>
-              <a:t>IA Aplicada a la Producción Pesquera   |   UTN FRCh   |   PesquerosEnIA   |   2026</a:t>
-            </a:r>
-          </a:p>
-        </p:txBody>
-      </p:sp>
       <p:pic>
         <p:nvPicPr>
-          <p:cNvPr id="10" name="Picture 9" descr="fishlogo.png"/>
+          <p:cNvPr id="2" name="Picture 1" descr="reuse_velocidad.png"/>
           <p:cNvPicPr>
             <a:picLocks noChangeAspect="1"/>
           </p:cNvPicPr>
@@ -5008,8 +3450,8 @@
         </p:blipFill>
         <p:spPr>
           <a:xfrm>
-            <a:off x="137160" y="6455664"/>
-            <a:ext cx="347472" cy="347472"/>
+            <a:off x="0" y="0"/>
+            <a:ext cx="12192000" cy="6858000"/>
           </a:xfrm>
           <a:prstGeom prst="rect">
             <a:avLst/>
@@ -5034,377 +3476,9 @@
         <p:nvPr/>
       </p:nvGrpSpPr>
       <p:grpSpPr/>
-      <p:sp>
-        <p:nvSpPr>
-          <p:cNvPr id="2" name="Rectangle 1"/>
-          <p:cNvSpPr/>
-          <p:nvPr/>
-        </p:nvSpPr>
-        <p:spPr>
-          <a:xfrm>
-            <a:off x="0" y="0"/>
-            <a:ext cx="12191695" cy="6858000"/>
-          </a:xfrm>
-          <a:prstGeom prst="rect">
-            <a:avLst/>
-          </a:prstGeom>
-          <a:solidFill>
-            <a:srgbClr val="F5F7FA"/>
-          </a:solidFill>
-          <a:ln>
-            <a:noFill/>
-          </a:ln>
-          <a:effectLst/>
-        </p:spPr>
-        <p:style>
-          <a:lnRef idx="1">
-            <a:schemeClr val="accent1"/>
-          </a:lnRef>
-          <a:fillRef idx="3">
-            <a:schemeClr val="accent1"/>
-          </a:fillRef>
-          <a:effectRef idx="2">
-            <a:schemeClr val="accent1"/>
-          </a:effectRef>
-          <a:fontRef idx="minor">
-            <a:schemeClr val="lt1"/>
-          </a:fontRef>
-        </p:style>
-        <p:txBody>
-          <a:bodyPr rtlCol="0" anchor="ctr"/>
-          <a:lstStyle/>
-          <a:p>
-            <a:pPr algn="ctr"/>
-          </a:p>
-        </p:txBody>
-      </p:sp>
-      <p:sp>
-        <p:nvSpPr>
-          <p:cNvPr id="3" name="Rectangle 2"/>
-          <p:cNvSpPr/>
-          <p:nvPr/>
-        </p:nvSpPr>
-        <p:spPr>
-          <a:xfrm>
-            <a:off x="0" y="0"/>
-            <a:ext cx="201168" cy="6858000"/>
-          </a:xfrm>
-          <a:prstGeom prst="rect">
-            <a:avLst/>
-          </a:prstGeom>
-          <a:solidFill>
-            <a:srgbClr val="962D37"/>
-          </a:solidFill>
-          <a:ln>
-            <a:noFill/>
-          </a:ln>
-          <a:effectLst/>
-        </p:spPr>
-        <p:style>
-          <a:lnRef idx="1">
-            <a:schemeClr val="accent1"/>
-          </a:lnRef>
-          <a:fillRef idx="3">
-            <a:schemeClr val="accent1"/>
-          </a:fillRef>
-          <a:effectRef idx="2">
-            <a:schemeClr val="accent1"/>
-          </a:effectRef>
-          <a:fontRef idx="minor">
-            <a:schemeClr val="lt1"/>
-          </a:fontRef>
-        </p:style>
-        <p:txBody>
-          <a:bodyPr rtlCol="0" anchor="ctr"/>
-          <a:lstStyle/>
-          <a:p>
-            <a:pPr algn="ctr"/>
-          </a:p>
-        </p:txBody>
-      </p:sp>
-      <p:sp>
-        <p:nvSpPr>
-          <p:cNvPr id="4" name="Rectangle 3"/>
-          <p:cNvSpPr/>
-          <p:nvPr/>
-        </p:nvSpPr>
-        <p:spPr>
-          <a:xfrm>
-            <a:off x="0" y="0"/>
-            <a:ext cx="12191695" cy="1371600"/>
-          </a:xfrm>
-          <a:prstGeom prst="rect">
-            <a:avLst/>
-          </a:prstGeom>
-          <a:solidFill>
-            <a:srgbClr val="962D37"/>
-          </a:solidFill>
-          <a:ln>
-            <a:noFill/>
-          </a:ln>
-          <a:effectLst/>
-        </p:spPr>
-        <p:style>
-          <a:lnRef idx="1">
-            <a:schemeClr val="accent1"/>
-          </a:lnRef>
-          <a:fillRef idx="3">
-            <a:schemeClr val="accent1"/>
-          </a:fillRef>
-          <a:effectRef idx="2">
-            <a:schemeClr val="accent1"/>
-          </a:effectRef>
-          <a:fontRef idx="minor">
-            <a:schemeClr val="lt1"/>
-          </a:fontRef>
-        </p:style>
-        <p:txBody>
-          <a:bodyPr rtlCol="0" anchor="ctr"/>
-          <a:lstStyle/>
-          <a:p>
-            <a:pPr algn="ctr"/>
-          </a:p>
-        </p:txBody>
-      </p:sp>
-      <p:sp>
-        <p:nvSpPr>
-          <p:cNvPr id="5" name="TextBox 4"/>
-          <p:cNvSpPr txBox="1"/>
-          <p:nvPr/>
-        </p:nvSpPr>
-        <p:spPr>
-          <a:xfrm>
-            <a:off x="365760" y="73152"/>
-            <a:ext cx="11247120" cy="411480"/>
-          </a:xfrm>
-          <a:prstGeom prst="rect">
-            <a:avLst/>
-          </a:prstGeom>
-          <a:noFill/>
-        </p:spPr>
-        <p:txBody>
-          <a:bodyPr wrap="square" anchor="t">
-            <a:spAutoFit/>
-          </a:bodyPr>
-          <a:lstStyle/>
-          <a:p>
-            <a:pPr algn="l"/>
-            <a:r>
-              <a:rPr sz="1300" b="1">
-                <a:solidFill>
-                  <a:srgbClr val="E7C14B"/>
-                </a:solidFill>
-                <a:latin typeface="Segoe UI"/>
-              </a:rPr>
-              <a:t>PERCIBIR · RAZONAR · ACTUAR</a:t>
-            </a:r>
-          </a:p>
-        </p:txBody>
-      </p:sp>
-      <p:sp>
-        <p:nvSpPr>
-          <p:cNvPr id="6" name="TextBox 5"/>
-          <p:cNvSpPr txBox="1"/>
-          <p:nvPr/>
-        </p:nvSpPr>
-        <p:spPr>
-          <a:xfrm>
-            <a:off x="365760" y="384048"/>
-            <a:ext cx="11064240" cy="914400"/>
-          </a:xfrm>
-          <a:prstGeom prst="rect">
-            <a:avLst/>
-          </a:prstGeom>
-          <a:noFill/>
-        </p:spPr>
-        <p:txBody>
-          <a:bodyPr wrap="square" anchor="t">
-            <a:spAutoFit/>
-          </a:bodyPr>
-          <a:lstStyle/>
-          <a:p>
-            <a:pPr algn="l"/>
-            <a:r>
-              <a:rPr sz="2600" b="1">
-                <a:solidFill>
-                  <a:srgbClr val="FFFFFF"/>
-                </a:solidFill>
-                <a:latin typeface="Segoe UI"/>
-              </a:rPr>
-              <a:t>Un agente de IA que vigila la flota</a:t>
-            </a:r>
-          </a:p>
-        </p:txBody>
-      </p:sp>
-      <p:sp>
-        <p:nvSpPr>
-          <p:cNvPr id="7" name="TextBox 6"/>
-          <p:cNvSpPr txBox="1"/>
-          <p:nvPr/>
-        </p:nvSpPr>
-        <p:spPr>
-          <a:xfrm>
-            <a:off x="502920" y="1691640"/>
-            <a:ext cx="11155680" cy="4572000"/>
-          </a:xfrm>
-          <a:prstGeom prst="rect">
-            <a:avLst/>
-          </a:prstGeom>
-          <a:noFill/>
-        </p:spPr>
-        <p:txBody>
-          <a:bodyPr wrap="square">
-            <a:spAutoFit/>
-          </a:bodyPr>
-          <a:lstStyle/>
-          <a:p>
-            <a:pPr>
-              <a:spcAft>
-                <a:spcPts val="1400"/>
-              </a:spcAft>
-            </a:pPr>
-            <a:r>
-              <a:rPr sz="1900">
-                <a:solidFill>
-                  <a:srgbClr val="1E1E32"/>
-                </a:solidFill>
-                <a:latin typeface="Segoe UI"/>
-              </a:rPr>
-              <a:t>•  Percibe el estado de cada barco, razona con los modelos y decide una acción</a:t>
-            </a:r>
-          </a:p>
-          <a:p>
-            <a:pPr>
-              <a:spcAft>
-                <a:spcPts val="1400"/>
-              </a:spcAft>
-            </a:pPr>
-            <a:r>
-              <a:rPr sz="1900">
-                <a:solidFill>
-                  <a:srgbClr val="1E1E32"/>
-                </a:solidFill>
-                <a:latin typeface="Segoe UI"/>
-              </a:rPr>
-              <a:t>•  Seguir, bajar velocidad o volver a puerto — de forma autónoma</a:t>
-            </a:r>
-          </a:p>
-          <a:p>
-            <a:pPr>
-              <a:spcAft>
-                <a:spcPts val="1400"/>
-              </a:spcAft>
-            </a:pPr>
-            <a:r>
-              <a:rPr sz="1900">
-                <a:solidFill>
-                  <a:srgbClr val="1E1E32"/>
-                </a:solidFill>
-                <a:latin typeface="Segoe UI"/>
-              </a:rPr>
-              <a:t>•  Prioriza la seguridad del motor sobre el ahorro</a:t>
-            </a:r>
-          </a:p>
-          <a:p>
-            <a:pPr>
-              <a:spcAft>
-                <a:spcPts val="1400"/>
-              </a:spcAft>
-            </a:pPr>
-            <a:r>
-              <a:rPr sz="1900">
-                <a:solidFill>
-                  <a:srgbClr val="1E1E32"/>
-                </a:solidFill>
-                <a:latin typeface="Segoe UI"/>
-              </a:rPr>
-              <a:t>•  Es un agente de reglas + ML, no un chat</a:t>
-            </a:r>
-          </a:p>
-        </p:txBody>
-      </p:sp>
-      <p:sp>
-        <p:nvSpPr>
-          <p:cNvPr id="8" name="Rectangle 7"/>
-          <p:cNvSpPr/>
-          <p:nvPr/>
-        </p:nvSpPr>
-        <p:spPr>
-          <a:xfrm>
-            <a:off x="0" y="6419088"/>
-            <a:ext cx="12191695" cy="438912"/>
-          </a:xfrm>
-          <a:prstGeom prst="rect">
-            <a:avLst/>
-          </a:prstGeom>
-          <a:solidFill>
-            <a:srgbClr val="962D37"/>
-          </a:solidFill>
-          <a:ln>
-            <a:noFill/>
-          </a:ln>
-          <a:effectLst/>
-        </p:spPr>
-        <p:style>
-          <a:lnRef idx="1">
-            <a:schemeClr val="accent1"/>
-          </a:lnRef>
-          <a:fillRef idx="3">
-            <a:schemeClr val="accent1"/>
-          </a:fillRef>
-          <a:effectRef idx="2">
-            <a:schemeClr val="accent1"/>
-          </a:effectRef>
-          <a:fontRef idx="minor">
-            <a:schemeClr val="lt1"/>
-          </a:fontRef>
-        </p:style>
-        <p:txBody>
-          <a:bodyPr rtlCol="0" anchor="ctr"/>
-          <a:lstStyle/>
-          <a:p>
-            <a:pPr algn="ctr"/>
-          </a:p>
-        </p:txBody>
-      </p:sp>
-      <p:sp>
-        <p:nvSpPr>
-          <p:cNvPr id="9" name="TextBox 8"/>
-          <p:cNvSpPr txBox="1"/>
-          <p:nvPr/>
-        </p:nvSpPr>
-        <p:spPr>
-          <a:xfrm>
-            <a:off x="566928" y="6473952"/>
-            <a:ext cx="11430000" cy="329184"/>
-          </a:xfrm>
-          <a:prstGeom prst="rect">
-            <a:avLst/>
-          </a:prstGeom>
-          <a:noFill/>
-        </p:spPr>
-        <p:txBody>
-          <a:bodyPr wrap="square" anchor="t">
-            <a:spAutoFit/>
-          </a:bodyPr>
-          <a:lstStyle/>
-          <a:p>
-            <a:pPr algn="l"/>
-            <a:r>
-              <a:rPr sz="1000" b="0">
-                <a:solidFill>
-                  <a:srgbClr val="FFFFFF"/>
-                </a:solidFill>
-                <a:latin typeface="Segoe UI"/>
-              </a:rPr>
-              <a:t>IA Aplicada a la Producción Pesquera   |   UTN FRCh   |   PesquerosEnIA   |   2026</a:t>
-            </a:r>
-          </a:p>
-        </p:txBody>
-      </p:sp>
       <p:pic>
         <p:nvPicPr>
-          <p:cNvPr id="10" name="Picture 9" descr="fishlogo.png"/>
+          <p:cNvPr id="2" name="Picture 1" descr="img_clustering.png"/>
           <p:cNvPicPr>
             <a:picLocks noChangeAspect="1"/>
           </p:cNvPicPr>
@@ -5418,8 +3492,8 @@
         </p:blipFill>
         <p:spPr>
           <a:xfrm>
-            <a:off x="137160" y="6455664"/>
-            <a:ext cx="347472" cy="347472"/>
+            <a:off x="0" y="0"/>
+            <a:ext cx="12192000" cy="6858000"/>
           </a:xfrm>
           <a:prstGeom prst="rect">
             <a:avLst/>
@@ -5444,120 +3518,30 @@
         <p:nvPr/>
       </p:nvGrpSpPr>
       <p:grpSpPr/>
-      <p:sp>
-        <p:nvSpPr>
-          <p:cNvPr id="2" name="Rectangle 1"/>
-          <p:cNvSpPr/>
+      <p:pic>
+        <p:nvPicPr>
+          <p:cNvPr id="2" name="Picture 1" descr="reuse_motor.png"/>
+          <p:cNvPicPr>
+            <a:picLocks noChangeAspect="1"/>
+          </p:cNvPicPr>
           <p:nvPr/>
-        </p:nvSpPr>
+        </p:nvPicPr>
+        <p:blipFill>
+          <a:blip r:embed="rId2"/>
+          <a:stretch>
+            <a:fillRect/>
+          </a:stretch>
+        </p:blipFill>
         <p:spPr>
           <a:xfrm>
             <a:off x="0" y="0"/>
-            <a:ext cx="12191695" cy="6858000"/>
+            <a:ext cx="12192000" cy="6858000"/>
           </a:xfrm>
           <a:prstGeom prst="rect">
             <a:avLst/>
           </a:prstGeom>
-          <a:solidFill>
-            <a:srgbClr val="962D37"/>
-          </a:solidFill>
-          <a:ln>
-            <a:noFill/>
-          </a:ln>
-          <a:effectLst/>
         </p:spPr>
-        <p:style>
-          <a:lnRef idx="1">
-            <a:schemeClr val="accent1"/>
-          </a:lnRef>
-          <a:fillRef idx="3">
-            <a:schemeClr val="accent1"/>
-          </a:fillRef>
-          <a:effectRef idx="2">
-            <a:schemeClr val="accent1"/>
-          </a:effectRef>
-          <a:fontRef idx="minor">
-            <a:schemeClr val="lt1"/>
-          </a:fontRef>
-        </p:style>
-        <p:txBody>
-          <a:bodyPr rtlCol="0" anchor="ctr"/>
-          <a:lstStyle/>
-          <a:p>
-            <a:pPr algn="ctr"/>
-          </a:p>
-        </p:txBody>
-      </p:sp>
-      <p:sp>
-        <p:nvSpPr>
-          <p:cNvPr id="3" name="TextBox 2"/>
-          <p:cNvSpPr txBox="1"/>
-          <p:nvPr/>
-        </p:nvSpPr>
-        <p:spPr>
-          <a:xfrm>
-            <a:off x="914400" y="2468880"/>
-            <a:ext cx="10332720" cy="1463040"/>
-          </a:xfrm>
-          <a:prstGeom prst="rect">
-            <a:avLst/>
-          </a:prstGeom>
-          <a:noFill/>
-        </p:spPr>
-        <p:txBody>
-          <a:bodyPr wrap="square" anchor="ctr">
-            <a:spAutoFit/>
-          </a:bodyPr>
-          <a:lstStyle/>
-          <a:p>
-            <a:pPr algn="ctr"/>
-            <a:r>
-              <a:rPr sz="3800" b="1">
-                <a:solidFill>
-                  <a:srgbClr val="FFFFFF"/>
-                </a:solidFill>
-                <a:latin typeface="Segoe UI"/>
-              </a:rPr>
-              <a:t>De la teoría a la operación</a:t>
-            </a:r>
-          </a:p>
-        </p:txBody>
-      </p:sp>
-      <p:sp>
-        <p:nvSpPr>
-          <p:cNvPr id="4" name="TextBox 3"/>
-          <p:cNvSpPr txBox="1"/>
-          <p:nvPr/>
-        </p:nvSpPr>
-        <p:spPr>
-          <a:xfrm>
-            <a:off x="1371600" y="4114800"/>
-            <a:ext cx="9418320" cy="914400"/>
-          </a:xfrm>
-          <a:prstGeom prst="rect">
-            <a:avLst/>
-          </a:prstGeom>
-          <a:noFill/>
-        </p:spPr>
-        <p:txBody>
-          <a:bodyPr wrap="square" anchor="t">
-            <a:spAutoFit/>
-          </a:bodyPr>
-          <a:lstStyle/>
-          <a:p>
-            <a:pPr algn="ctr"/>
-            <a:r>
-              <a:rPr sz="2000" b="0">
-                <a:solidFill>
-                  <a:srgbClr val="DDE9F0"/>
-                </a:solidFill>
-                <a:latin typeface="Segoe UI"/>
-              </a:rPr>
-              <a:t>Optimizar sin sobreexplotar; la tecnología atiende lo urgente</a:t>
-            </a:r>
-          </a:p>
-        </p:txBody>
-      </p:sp>
+      </p:pic>
     </p:spTree>
   </p:cSld>
   <p:clrMapOvr>
@@ -5578,7 +3562,7 @@
       <p:grpSpPr/>
       <p:pic>
         <p:nvPicPr>
-          <p:cNvPr id="2" name="Picture 1" descr="c8_1.png"/>
+          <p:cNvPr id="2" name="Picture 1" descr="reuse_agente.png"/>
           <p:cNvPicPr>
             <a:picLocks noChangeAspect="1"/>
           </p:cNvPicPr>
@@ -5593,7 +3577,7 @@
         <p:spPr>
           <a:xfrm>
             <a:off x="0" y="0"/>
-            <a:ext cx="12191695" cy="6858000"/>
+            <a:ext cx="12192000" cy="6858000"/>
           </a:xfrm>
           <a:prstGeom prst="rect">
             <a:avLst/>
@@ -5620,7 +3604,7 @@
       <p:grpSpPr/>
       <p:pic>
         <p:nvPicPr>
-          <p:cNvPr id="2" name="Picture 1" descr="c8_2.png"/>
+          <p:cNvPr id="2" name="Picture 1" descr="img_cierre.png"/>
           <p:cNvPicPr>
             <a:picLocks noChangeAspect="1"/>
           </p:cNvPicPr>
@@ -5635,7 +3619,7 @@
         <p:spPr>
           <a:xfrm>
             <a:off x="0" y="0"/>
-            <a:ext cx="12191695" cy="6858000"/>
+            <a:ext cx="12192000" cy="6858000"/>
           </a:xfrm>
           <a:prstGeom prst="rect">
             <a:avLst/>
